--- a/SMART on FHIR Primer.pptx
+++ b/SMART on FHIR Primer.pptx
@@ -327,7 +327,7 @@
           <a:p>
             <a:fld id="{4031681A-4B84-4DE8-A5EF-A885124D351C}" type="datetimeFigureOut">
               <a:rPr lang="en-US" smtClean="0"/>
-              <a:t>1/19/2026</a:t>
+              <a:t>3/1/2026</a:t>
             </a:fld>
             <a:endParaRPr lang="en-US"/>
           </a:p>
@@ -921,7 +921,7 @@
           <a:p>
             <a:fld id="{DEA2229F-D951-4A8F-BA2A-3B6A0B3F46E2}" type="datetimeFigureOut">
               <a:rPr lang="en-US" smtClean="0"/>
-              <a:t>1/19/2026</a:t>
+              <a:t>3/1/2026</a:t>
             </a:fld>
             <a:endParaRPr lang="en-US"/>
           </a:p>
@@ -1089,7 +1089,7 @@
           <a:p>
             <a:fld id="{DEA2229F-D951-4A8F-BA2A-3B6A0B3F46E2}" type="datetimeFigureOut">
               <a:rPr lang="en-US" smtClean="0"/>
-              <a:t>1/19/2026</a:t>
+              <a:t>3/1/2026</a:t>
             </a:fld>
             <a:endParaRPr lang="en-US"/>
           </a:p>
@@ -1267,7 +1267,7 @@
           <a:p>
             <a:fld id="{DEA2229F-D951-4A8F-BA2A-3B6A0B3F46E2}" type="datetimeFigureOut">
               <a:rPr lang="en-US" smtClean="0"/>
-              <a:t>1/19/2026</a:t>
+              <a:t>3/1/2026</a:t>
             </a:fld>
             <a:endParaRPr lang="en-US"/>
           </a:p>
@@ -1723,7 +1723,7 @@
           <a:p>
             <a:fld id="{DEA2229F-D951-4A8F-BA2A-3B6A0B3F46E2}" type="datetimeFigureOut">
               <a:rPr lang="en-US" smtClean="0"/>
-              <a:t>1/19/2026</a:t>
+              <a:t>3/1/2026</a:t>
             </a:fld>
             <a:endParaRPr lang="en-US"/>
           </a:p>
@@ -1968,7 +1968,7 @@
           <a:p>
             <a:fld id="{DEA2229F-D951-4A8F-BA2A-3B6A0B3F46E2}" type="datetimeFigureOut">
               <a:rPr lang="en-US" smtClean="0"/>
-              <a:t>1/19/2026</a:t>
+              <a:t>3/1/2026</a:t>
             </a:fld>
             <a:endParaRPr lang="en-US"/>
           </a:p>
@@ -2197,7 +2197,7 @@
           <a:p>
             <a:fld id="{DEA2229F-D951-4A8F-BA2A-3B6A0B3F46E2}" type="datetimeFigureOut">
               <a:rPr lang="en-US" smtClean="0"/>
-              <a:t>1/19/2026</a:t>
+              <a:t>3/1/2026</a:t>
             </a:fld>
             <a:endParaRPr lang="en-US"/>
           </a:p>
@@ -2561,7 +2561,7 @@
           <a:p>
             <a:fld id="{DEA2229F-D951-4A8F-BA2A-3B6A0B3F46E2}" type="datetimeFigureOut">
               <a:rPr lang="en-US" smtClean="0"/>
-              <a:t>1/19/2026</a:t>
+              <a:t>3/1/2026</a:t>
             </a:fld>
             <a:endParaRPr lang="en-US"/>
           </a:p>
@@ -2678,7 +2678,7 @@
           <a:p>
             <a:fld id="{DEA2229F-D951-4A8F-BA2A-3B6A0B3F46E2}" type="datetimeFigureOut">
               <a:rPr lang="en-US" smtClean="0"/>
-              <a:t>1/19/2026</a:t>
+              <a:t>3/1/2026</a:t>
             </a:fld>
             <a:endParaRPr lang="en-US"/>
           </a:p>
@@ -2773,7 +2773,7 @@
           <a:p>
             <a:fld id="{DEA2229F-D951-4A8F-BA2A-3B6A0B3F46E2}" type="datetimeFigureOut">
               <a:rPr lang="en-US" smtClean="0"/>
-              <a:t>1/19/2026</a:t>
+              <a:t>3/1/2026</a:t>
             </a:fld>
             <a:endParaRPr lang="en-US"/>
           </a:p>
@@ -3048,7 +3048,7 @@
           <a:p>
             <a:fld id="{DEA2229F-D951-4A8F-BA2A-3B6A0B3F46E2}" type="datetimeFigureOut">
               <a:rPr lang="en-US" smtClean="0"/>
-              <a:t>1/19/2026</a:t>
+              <a:t>3/1/2026</a:t>
             </a:fld>
             <a:endParaRPr lang="en-US"/>
           </a:p>
@@ -3300,7 +3300,7 @@
           <a:p>
             <a:fld id="{DEA2229F-D951-4A8F-BA2A-3B6A0B3F46E2}" type="datetimeFigureOut">
               <a:rPr lang="en-US" smtClean="0"/>
-              <a:t>1/19/2026</a:t>
+              <a:t>3/1/2026</a:t>
             </a:fld>
             <a:endParaRPr lang="en-US"/>
           </a:p>
@@ -3511,7 +3511,7 @@
           <a:p>
             <a:fld id="{DEA2229F-D951-4A8F-BA2A-3B6A0B3F46E2}" type="datetimeFigureOut">
               <a:rPr lang="en-US" smtClean="0"/>
-              <a:t>1/19/2026</a:t>
+              <a:t>3/1/2026</a:t>
             </a:fld>
             <a:endParaRPr lang="en-US"/>
           </a:p>
@@ -4088,20 +4088,16 @@
           <a:lstStyle/>
           <a:p>
             <a:r>
-              <a:rPr lang="en-US"/>
-              <a:t>21</a:t>
-            </a:r>
-            <a:r>
-              <a:rPr lang="en-US" baseline="30000"/>
-              <a:t>th</a:t>
-            </a:r>
-            <a:r>
-              <a:rPr lang="en-US"/>
-              <a:t> </a:t>
-            </a:r>
-            <a:r>
               <a:rPr lang="en-US" dirty="0"/>
-              <a:t>of January 2026</a:t>
+              <a:t>3</a:t>
+            </a:r>
+            <a:r>
+              <a:rPr lang="en-US" baseline="30000" dirty="0"/>
+              <a:t>rd</a:t>
+            </a:r>
+            <a:r>
+              <a:rPr lang="en-US" dirty="0"/>
+              <a:t> of March 2026</a:t>
             </a:r>
           </a:p>
         </p:txBody>

--- a/SMART on FHIR Primer.pptx
+++ b/SMART on FHIR Primer.pptx
@@ -327,7 +327,7 @@
           <a:p>
             <a:fld id="{4031681A-4B84-4DE8-A5EF-A885124D351C}" type="datetimeFigureOut">
               <a:rPr lang="en-US" smtClean="0"/>
-              <a:t>3/1/2026</a:t>
+              <a:t>4/27/2026</a:t>
             </a:fld>
             <a:endParaRPr lang="en-US"/>
           </a:p>
@@ -921,7 +921,7 @@
           <a:p>
             <a:fld id="{DEA2229F-D951-4A8F-BA2A-3B6A0B3F46E2}" type="datetimeFigureOut">
               <a:rPr lang="en-US" smtClean="0"/>
-              <a:t>3/1/2026</a:t>
+              <a:t>4/27/2026</a:t>
             </a:fld>
             <a:endParaRPr lang="en-US"/>
           </a:p>
@@ -1089,7 +1089,7 @@
           <a:p>
             <a:fld id="{DEA2229F-D951-4A8F-BA2A-3B6A0B3F46E2}" type="datetimeFigureOut">
               <a:rPr lang="en-US" smtClean="0"/>
-              <a:t>3/1/2026</a:t>
+              <a:t>4/27/2026</a:t>
             </a:fld>
             <a:endParaRPr lang="en-US"/>
           </a:p>
@@ -1267,7 +1267,7 @@
           <a:p>
             <a:fld id="{DEA2229F-D951-4A8F-BA2A-3B6A0B3F46E2}" type="datetimeFigureOut">
               <a:rPr lang="en-US" smtClean="0"/>
-              <a:t>3/1/2026</a:t>
+              <a:t>4/27/2026</a:t>
             </a:fld>
             <a:endParaRPr lang="en-US"/>
           </a:p>
@@ -1723,7 +1723,7 @@
           <a:p>
             <a:fld id="{DEA2229F-D951-4A8F-BA2A-3B6A0B3F46E2}" type="datetimeFigureOut">
               <a:rPr lang="en-US" smtClean="0"/>
-              <a:t>3/1/2026</a:t>
+              <a:t>4/27/2026</a:t>
             </a:fld>
             <a:endParaRPr lang="en-US"/>
           </a:p>
@@ -1968,7 +1968,7 @@
           <a:p>
             <a:fld id="{DEA2229F-D951-4A8F-BA2A-3B6A0B3F46E2}" type="datetimeFigureOut">
               <a:rPr lang="en-US" smtClean="0"/>
-              <a:t>3/1/2026</a:t>
+              <a:t>4/27/2026</a:t>
             </a:fld>
             <a:endParaRPr lang="en-US"/>
           </a:p>
@@ -2197,7 +2197,7 @@
           <a:p>
             <a:fld id="{DEA2229F-D951-4A8F-BA2A-3B6A0B3F46E2}" type="datetimeFigureOut">
               <a:rPr lang="en-US" smtClean="0"/>
-              <a:t>3/1/2026</a:t>
+              <a:t>4/27/2026</a:t>
             </a:fld>
             <a:endParaRPr lang="en-US"/>
           </a:p>
@@ -2561,7 +2561,7 @@
           <a:p>
             <a:fld id="{DEA2229F-D951-4A8F-BA2A-3B6A0B3F46E2}" type="datetimeFigureOut">
               <a:rPr lang="en-US" smtClean="0"/>
-              <a:t>3/1/2026</a:t>
+              <a:t>4/27/2026</a:t>
             </a:fld>
             <a:endParaRPr lang="en-US"/>
           </a:p>
@@ -2678,7 +2678,7 @@
           <a:p>
             <a:fld id="{DEA2229F-D951-4A8F-BA2A-3B6A0B3F46E2}" type="datetimeFigureOut">
               <a:rPr lang="en-US" smtClean="0"/>
-              <a:t>3/1/2026</a:t>
+              <a:t>4/27/2026</a:t>
             </a:fld>
             <a:endParaRPr lang="en-US"/>
           </a:p>
@@ -2773,7 +2773,7 @@
           <a:p>
             <a:fld id="{DEA2229F-D951-4A8F-BA2A-3B6A0B3F46E2}" type="datetimeFigureOut">
               <a:rPr lang="en-US" smtClean="0"/>
-              <a:t>3/1/2026</a:t>
+              <a:t>4/27/2026</a:t>
             </a:fld>
             <a:endParaRPr lang="en-US"/>
           </a:p>
@@ -3048,7 +3048,7 @@
           <a:p>
             <a:fld id="{DEA2229F-D951-4A8F-BA2A-3B6A0B3F46E2}" type="datetimeFigureOut">
               <a:rPr lang="en-US" smtClean="0"/>
-              <a:t>3/1/2026</a:t>
+              <a:t>4/27/2026</a:t>
             </a:fld>
             <a:endParaRPr lang="en-US"/>
           </a:p>
@@ -3300,7 +3300,7 @@
           <a:p>
             <a:fld id="{DEA2229F-D951-4A8F-BA2A-3B6A0B3F46E2}" type="datetimeFigureOut">
               <a:rPr lang="en-US" smtClean="0"/>
-              <a:t>3/1/2026</a:t>
+              <a:t>4/27/2026</a:t>
             </a:fld>
             <a:endParaRPr lang="en-US"/>
           </a:p>
@@ -3511,7 +3511,7 @@
           <a:p>
             <a:fld id="{DEA2229F-D951-4A8F-BA2A-3B6A0B3F46E2}" type="datetimeFigureOut">
               <a:rPr lang="en-US" smtClean="0"/>
-              <a:t>3/1/2026</a:t>
+              <a:t>4/27/2026</a:t>
             </a:fld>
             <a:endParaRPr lang="en-US"/>
           </a:p>
@@ -4088,17 +4088,10 @@
           <a:lstStyle/>
           <a:p>
             <a:r>
-              <a:rPr lang="en-US" dirty="0"/>
-              <a:t>3</a:t>
-            </a:r>
-            <a:r>
-              <a:rPr lang="en-US" baseline="30000" dirty="0"/>
-              <a:t>rd</a:t>
-            </a:r>
-            <a:r>
-              <a:rPr lang="en-US" dirty="0"/>
-              <a:t> of March 2026</a:t>
-            </a:r>
+              <a:rPr lang="en-US"/>
+              <a:t>April 29th, 2026</a:t>
+            </a:r>
+            <a:endParaRPr lang="en-US" dirty="0"/>
           </a:p>
         </p:txBody>
       </p:sp>

--- a/SMART on FHIR Primer.pptx
+++ b/SMART on FHIR Primer.pptx
@@ -327,7 +327,7 @@
           <a:p>
             <a:fld id="{4031681A-4B84-4DE8-A5EF-A885124D351C}" type="datetimeFigureOut">
               <a:rPr lang="en-US" smtClean="0"/>
-              <a:t>4/27/2026</a:t>
+              <a:t>8/17/2026</a:t>
             </a:fld>
             <a:endParaRPr lang="en-US"/>
           </a:p>
@@ -921,7 +921,7 @@
           <a:p>
             <a:fld id="{DEA2229F-D951-4A8F-BA2A-3B6A0B3F46E2}" type="datetimeFigureOut">
               <a:rPr lang="en-US" smtClean="0"/>
-              <a:t>4/27/2026</a:t>
+              <a:t>8/17/2026</a:t>
             </a:fld>
             <a:endParaRPr lang="en-US"/>
           </a:p>
@@ -1089,7 +1089,7 @@
           <a:p>
             <a:fld id="{DEA2229F-D951-4A8F-BA2A-3B6A0B3F46E2}" type="datetimeFigureOut">
               <a:rPr lang="en-US" smtClean="0"/>
-              <a:t>4/27/2026</a:t>
+              <a:t>8/17/2026</a:t>
             </a:fld>
             <a:endParaRPr lang="en-US"/>
           </a:p>
@@ -1267,7 +1267,7 @@
           <a:p>
             <a:fld id="{DEA2229F-D951-4A8F-BA2A-3B6A0B3F46E2}" type="datetimeFigureOut">
               <a:rPr lang="en-US" smtClean="0"/>
-              <a:t>4/27/2026</a:t>
+              <a:t>8/17/2026</a:t>
             </a:fld>
             <a:endParaRPr lang="en-US"/>
           </a:p>
@@ -1723,7 +1723,7 @@
           <a:p>
             <a:fld id="{DEA2229F-D951-4A8F-BA2A-3B6A0B3F46E2}" type="datetimeFigureOut">
               <a:rPr lang="en-US" smtClean="0"/>
-              <a:t>4/27/2026</a:t>
+              <a:t>8/17/2026</a:t>
             </a:fld>
             <a:endParaRPr lang="en-US"/>
           </a:p>
@@ -1968,7 +1968,7 @@
           <a:p>
             <a:fld id="{DEA2229F-D951-4A8F-BA2A-3B6A0B3F46E2}" type="datetimeFigureOut">
               <a:rPr lang="en-US" smtClean="0"/>
-              <a:t>4/27/2026</a:t>
+              <a:t>8/17/2026</a:t>
             </a:fld>
             <a:endParaRPr lang="en-US"/>
           </a:p>
@@ -2197,7 +2197,7 @@
           <a:p>
             <a:fld id="{DEA2229F-D951-4A8F-BA2A-3B6A0B3F46E2}" type="datetimeFigureOut">
               <a:rPr lang="en-US" smtClean="0"/>
-              <a:t>4/27/2026</a:t>
+              <a:t>8/17/2026</a:t>
             </a:fld>
             <a:endParaRPr lang="en-US"/>
           </a:p>
@@ -2561,7 +2561,7 @@
           <a:p>
             <a:fld id="{DEA2229F-D951-4A8F-BA2A-3B6A0B3F46E2}" type="datetimeFigureOut">
               <a:rPr lang="en-US" smtClean="0"/>
-              <a:t>4/27/2026</a:t>
+              <a:t>8/17/2026</a:t>
             </a:fld>
             <a:endParaRPr lang="en-US"/>
           </a:p>
@@ -2678,7 +2678,7 @@
           <a:p>
             <a:fld id="{DEA2229F-D951-4A8F-BA2A-3B6A0B3F46E2}" type="datetimeFigureOut">
               <a:rPr lang="en-US" smtClean="0"/>
-              <a:t>4/27/2026</a:t>
+              <a:t>8/17/2026</a:t>
             </a:fld>
             <a:endParaRPr lang="en-US"/>
           </a:p>
@@ -2773,7 +2773,7 @@
           <a:p>
             <a:fld id="{DEA2229F-D951-4A8F-BA2A-3B6A0B3F46E2}" type="datetimeFigureOut">
               <a:rPr lang="en-US" smtClean="0"/>
-              <a:t>4/27/2026</a:t>
+              <a:t>8/17/2026</a:t>
             </a:fld>
             <a:endParaRPr lang="en-US"/>
           </a:p>
@@ -3048,7 +3048,7 @@
           <a:p>
             <a:fld id="{DEA2229F-D951-4A8F-BA2A-3B6A0B3F46E2}" type="datetimeFigureOut">
               <a:rPr lang="en-US" smtClean="0"/>
-              <a:t>4/27/2026</a:t>
+              <a:t>8/17/2026</a:t>
             </a:fld>
             <a:endParaRPr lang="en-US"/>
           </a:p>
@@ -3300,7 +3300,7 @@
           <a:p>
             <a:fld id="{DEA2229F-D951-4A8F-BA2A-3B6A0B3F46E2}" type="datetimeFigureOut">
               <a:rPr lang="en-US" smtClean="0"/>
-              <a:t>4/27/2026</a:t>
+              <a:t>8/17/2026</a:t>
             </a:fld>
             <a:endParaRPr lang="en-US"/>
           </a:p>
@@ -3511,7 +3511,7 @@
           <a:p>
             <a:fld id="{DEA2229F-D951-4A8F-BA2A-3B6A0B3F46E2}" type="datetimeFigureOut">
               <a:rPr lang="en-US" smtClean="0"/>
-              <a:t>4/27/2026</a:t>
+              <a:t>8/17/2026</a:t>
             </a:fld>
             <a:endParaRPr lang="en-US"/>
           </a:p>
@@ -4088,10 +4088,17 @@
           <a:lstStyle/>
           <a:p>
             <a:r>
-              <a:rPr lang="en-US"/>
-              <a:t>April 29th, 2026</a:t>
-            </a:r>
-            <a:endParaRPr lang="en-US" dirty="0"/>
+              <a:rPr lang="en-US" dirty="0"/>
+              <a:t>19</a:t>
+            </a:r>
+            <a:r>
+              <a:rPr lang="en-US" baseline="30000" dirty="0"/>
+              <a:t>th</a:t>
+            </a:r>
+            <a:r>
+              <a:rPr lang="en-US" dirty="0"/>
+              <a:t> of August 2026</a:t>
+            </a:r>
           </a:p>
         </p:txBody>
       </p:sp>
